--- a/decks/geog-africa/geog-africa_ch3_climate.pptx
+++ b/decks/geog-africa/geog-africa_ch3_climate.pptx
@@ -125,30 +125,30 @@
   <p:extLst>
     <p:ext uri="{521415D9-36F7-43E2-AB2F-B90AF26B5E84}">
       <p14:sectionLst xmlns:p14="http://schemas.microsoft.com/office/powerpoint/2010/main">
-        <p14:section name="Opening" id="{3be75236-a111-93a8-06ac-33d363c438c1}">
+        <p14:section name="Opening" id="{a14683d8-a797-a5b5-5c6c-82658985f254}">
           <p14:sldIdLst>
             <p14:sldId id="256"/>
           </p14:sldIdLst>
         </p14:section>
-        <p14:section name="Gate" id="{b43f174e-e298-1481-a6db-3ceb4cab230d}">
+        <p14:section name="Gate" id="{bb9c263f-0138-5a9e-8a22-bd49e39e4268}">
           <p14:sldIdLst>
             <p14:sldId id="257"/>
             <p14:sldId id="258"/>
           </p14:sldIdLst>
         </p14:section>
-        <p14:section name="Pre-teach" id="{902e1b18-a808-6746-d4f8-3f6a2256dddf}">
+        <p14:section name="Pre-teach" id="{c6712cfe-b827-88ba-6523-c540993dbd6d}">
           <p14:sldIdLst>
             <p14:sldId id="259"/>
             <p14:sldId id="260"/>
           </p14:sldIdLst>
         </p14:section>
-        <p14:section name="Read-along" id="{686c3cf0-328c-7e70-d140-9da75ddbaf58}">
+        <p14:section name="Read-along" id="{0b8e0f7f-505b-0869-6bcb-9478823c1319}">
           <p14:sldIdLst>
             <p14:sldId id="261"/>
             <p14:sldId id="262"/>
           </p14:sldIdLst>
         </p14:section>
-        <p14:section name="Teach" id="{fcf0600a-d530-a149-817c-b0a6e0b571f9}">
+        <p14:section name="Teach" id="{bef9c364-9f8f-aa5f-6132-09c7ce3d6019}">
           <p14:sldIdLst>
             <p14:sldId id="263"/>
             <p14:sldId id="264"/>
@@ -156,7 +156,7 @@
             <p14:sldId id="266"/>
           </p14:sldIdLst>
         </p14:section>
-        <p14:section name="Routes" id="{ed817e01-4a00-05ba-5a89-adb23956ac4d}">
+        <p14:section name="Routes" id="{3d4446bd-2b9e-1c8b-3278-24de98a4d986}">
           <p14:sldIdLst>
             <p14:sldId id="267"/>
             <p14:sldId id="268"/>
@@ -164,12 +164,12 @@
             <p14:sldId id="270"/>
           </p14:sldIdLst>
         </p14:section>
-        <p14:section name="Close" id="{30194851-858d-9b8e-b1ba-90b70d76cff4}">
+        <p14:section name="Close" id="{020815b6-e554-b5ab-8206-64ddd04ec381}">
           <p14:sldIdLst>
             <p14:sldId id="271"/>
           </p14:sldIdLst>
         </p14:section>
-        <p14:section name="Answers" id="{2488ec9e-7663-5d59-3c0a-27a15e61400e}">
+        <p14:section name="Answers" id="{30b1516c-1ada-176b-3b55-7e5b3e666f79}">
           <p14:sldIdLst>
             <p14:sldId id="272"/>
             <p14:sldId id="273"/>
